--- a/mendi-pitch/EEGBase-Mendi-Pitch-Deck.pptx
+++ b/mendi-pitch/EEGBase-Mendi-Pitch-Deck.pptx
@@ -2430,7 +2430,7 @@
                 <a:ea typeface="Calibri" pitchFamily="34" charset="-122"/>
                 <a:cs typeface="Calibri" pitchFamily="34" charset="-120"/>
               </a:rPr>
-              <a:t>eegbase.vercel.app/demo  ·  github.com/eegbase/eegbase  ·  hello@eegbase.com</a:t>
+              <a:t>eegbase.vercel.app/demo  ·  github.com/jpiscool/eegbase  ·  hello@eegbase.com</a:t>
             </a:r>
             <a:endParaRPr lang="en-US" sz="1100" dirty="0"/>
           </a:p>

--- a/mendi-pitch/EEGBase-Mendi-Pitch-Deck.pptx
+++ b/mendi-pitch/EEGBase-Mendi-Pitch-Deck.pptx
@@ -5719,7 +5719,7 @@
                 <a:ea typeface="Calibri" pitchFamily="34" charset="-122"/>
                 <a:cs typeface="Calibri" pitchFamily="34" charset="-120"/>
               </a:rPr>
-              <a:t>99.97% rolling 90-day · 15-min RTO · multi-region</a:t>
+              <a:t>99.95% rolling 90-day · 15-min RTO · multi-region</a:t>
             </a:r>
             <a:endParaRPr lang="en-US" sz="1100" dirty="0"/>
           </a:p>
